--- a/MS Elevate Internship- Project by-kirtan.pptx
+++ b/MS Elevate Internship- Project by-kirtan.pptx
@@ -3895,7 +3895,7 @@
         </p:nvSpPr>
         <p:spPr>
           <a:xfrm>
-            <a:off x="152400" y="685800"/>
+            <a:off x="76200" y="609600"/>
             <a:ext cx="7387590" cy="624530"/>
           </a:xfrm>
           <a:prstGeom prst="rect">
@@ -3943,8 +3943,8 @@
         </p:nvSpPr>
         <p:spPr bwMode="auto">
           <a:xfrm>
-            <a:off x="220453" y="1335166"/>
-            <a:ext cx="10142747" cy="4770537"/>
+            <a:off x="220453" y="1073558"/>
+            <a:ext cx="10142747" cy="5293757"/>
           </a:xfrm>
           <a:prstGeom prst="rect">
             <a:avLst/>
@@ -4271,7 +4271,43 @@
               <a:buFont typeface="Arial" panose="020B0604020202020204" pitchFamily="34" charset="0"/>
               <a:buChar char="•"/>
             </a:pPr>
-            <a:endParaRPr lang="en-IN" sz="1400" dirty="0">
+            <a:r>
+              <a:rPr lang="en-IN" sz="2400" b="1" dirty="0">
+                <a:latin typeface="+mj-lt"/>
+              </a:rPr>
+              <a:t>GitHub</a:t>
+            </a:r>
+            <a:r>
+              <a:rPr lang="en-IN" sz="2800" b="1" dirty="0">
+                <a:latin typeface="+mj-lt"/>
+              </a:rPr>
+              <a:t> </a:t>
+            </a:r>
+            <a:r>
+              <a:rPr lang="en-IN" sz="2400" b="1" dirty="0">
+                <a:latin typeface="+mj-lt"/>
+              </a:rPr>
+              <a:t>Link</a:t>
+            </a:r>
+            <a:endParaRPr lang="en-IN" sz="1800" b="1" dirty="0">
+              <a:latin typeface="+mj-lt"/>
+            </a:endParaRPr>
+          </a:p>
+          <a:p>
+            <a:r>
+              <a:rPr lang="en-IN" sz="1800" b="1" dirty="0">
+                <a:latin typeface="+mj-lt"/>
+              </a:rPr>
+              <a:t>     </a:t>
+            </a:r>
+            <a:r>
+              <a:rPr lang="en-IN" sz="1800" b="1" dirty="0">
+                <a:latin typeface="+mj-lt"/>
+                <a:hlinkClick r:id="rId8"/>
+              </a:rPr>
+              <a:t>https://github.com/KirtanThumar/urban-resource-consumption-analysis-and-prediction</a:t>
+            </a:r>
+            <a:endParaRPr lang="en-IN" sz="1800" b="1" dirty="0">
               <a:latin typeface="+mj-lt"/>
             </a:endParaRPr>
           </a:p>
